--- a/docs/advisory/deck/冠松01楼-招商合作-工作版.pptx
+++ b/docs/advisory/deck/冠松01楼-招商合作-工作版.pptx
@@ -3218,7 +3218,7 @@
                 <a:ea typeface="WenQuanYi Micro Hei"/>
                 <a:cs typeface="WenQuanYi Micro Hei"/>
               </a:rPr>
-              <a:t>工作版 v1.1 · 给你继续改</a:t>
+              <a:t>工作版 v1.2 · 给你继续改</a:t>
             </a:r>
           </a:p>
         </p:txBody>
@@ -3312,7 +3312,7 @@
                 <a:ea typeface="WenQuanYi Micro Hei"/>
                 <a:cs typeface="WenQuanYi Micro Hei"/>
               </a:rPr>
-              <a:t>包干 8 万 · 佣金跟中介同一把尺 · 招到盖章才算完</a:t>
+              <a:t>启动 15 万 + 月度 8 万 + 首年租金 8% · 四条柔化</a:t>
             </a:r>
           </a:p>
         </p:txBody>
@@ -3561,7 +3561,7 @@
                 <a:ea typeface="WenQuanYi Micro Hei"/>
                 <a:cs typeface="WenQuanYi Micro Hei"/>
               </a:rPr>
-              <a:t>首月不含税净租金 = 面积 × 日租金 × 30。免租不影响这个分子。</a:t>
+              <a:t>基数 = 面积 × 日租金 × 365 ×（12−免租月）/12。免租按 3 个月计。</a:t>
             </a:r>
           </a:p>
         </p:txBody>
@@ -3643,7 +3643,7 @@
                 <a:ea typeface="WenQuanYi Micro Hei"/>
                 <a:cs typeface="WenQuanYi Micro Hei"/>
               </a:rPr>
-              <a:t>工作版 v1.1 · 可深化 · 收费口径勿改乱</a:t>
+              <a:t>工作版 v1.2 · 可深化 · 收费口径勿改乱</a:t>
             </a:r>
           </a:p>
         </p:txBody>
@@ -3708,12 +3708,12 @@
               </a:tblPr>
               <a:tblGrid>
                 <a:gridCol w="2194560"/>
+                <a:gridCol w="2560320"/>
+                <a:gridCol w="2377440"/>
                 <a:gridCol w="2194560"/>
                 <a:gridCol w="2103120"/>
-                <a:gridCol w="2468880"/>
-                <a:gridCol w="2468880"/>
               </a:tblGrid>
-              <a:tr h="811530">
+              <a:tr h="1082040">
                 <a:tc>
                   <a:txBody>
                     <a:bodyPr wrap="square"/>
@@ -3754,7 +3754,7 @@
                           <a:ea typeface="WenQuanYi Micro Hei"/>
                           <a:cs typeface="WenQuanYi Micro Hei"/>
                         </a:rPr>
-                        <a:t>面积</a:t>
+                        <a:t>面积 / 日租</a:t>
                       </a:r>
                     </a:p>
                   </a:txBody>
@@ -3779,7 +3779,7 @@
                           <a:ea typeface="WenQuanYi Micro Hei"/>
                           <a:cs typeface="WenQuanYi Micro Hei"/>
                         </a:rPr>
-                        <a:t>首月净租金</a:t>
+                        <a:t>首年现金租金</a:t>
                       </a:r>
                     </a:p>
                   </a:txBody>
@@ -3804,7 +3804,7 @@
                           <a:ea typeface="WenQuanYi Micro Hei"/>
                           <a:cs typeface="WenQuanYi Micro Hei"/>
                         </a:rPr>
-                        <a:t>我们自拓（100%）</a:t>
+                        <a:t>我们自拓 8%</a:t>
                       </a:r>
                     </a:p>
                   </a:txBody>
@@ -3829,7 +3829,7 @@
                           <a:ea typeface="WenQuanYi Micro Hei"/>
                           <a:cs typeface="WenQuanYi Micro Hei"/>
                         </a:rPr>
-                        <a:t>锚定（150%）</a:t>
+                        <a:t>中介单我们 4%</a:t>
                       </a:r>
                     </a:p>
                   </a:txBody>
@@ -3840,14 +3840,14 @@
                   </a:tcPr>
                 </a:tc>
               </a:tr>
-              <a:tr h="811530">
+              <a:tr h="1082040">
                 <a:tc>
                   <a:txBody>
                     <a:bodyPr wrap="square"/>
                     <a:lstStyle/>
                     <a:p>
                       <a:r>
-                        <a:rPr sz="1300" b="0" i="0">
+                        <a:rPr sz="1400" b="0" i="0">
                           <a:solidFill>
                             <a:srgbClr val="2A2D34"/>
                           </a:solidFill>
@@ -3871,7 +3871,7 @@
                     <a:lstStyle/>
                     <a:p>
                       <a:r>
-                        <a:rPr sz="1300" b="0" i="0">
+                        <a:rPr sz="1400" b="0" i="0">
                           <a:solidFill>
                             <a:srgbClr val="2A2D34"/>
                           </a:solidFill>
@@ -3895,7 +3895,7 @@
                     <a:lstStyle/>
                     <a:p>
                       <a:r>
-                        <a:rPr sz="1300" b="0" i="0">
+                        <a:rPr sz="1400" b="0" i="0">
                           <a:solidFill>
                             <a:srgbClr val="2A2D34"/>
                           </a:solidFill>
@@ -3903,7 +3903,7 @@
                           <a:ea typeface="WenQuanYi Micro Hei"/>
                           <a:cs typeface="WenQuanYi Micro Hei"/>
                         </a:rPr>
-                        <a:t>约 15.6 万</a:t>
+                        <a:t>约 142 万</a:t>
                       </a:r>
                     </a:p>
                   </a:txBody>
@@ -3919,7 +3919,7 @@
                     <a:lstStyle/>
                     <a:p>
                       <a:r>
-                        <a:rPr sz="1300" b="0" i="0">
+                        <a:rPr sz="1400" b="0" i="0">
                           <a:solidFill>
                             <a:srgbClr val="2A2D34"/>
                           </a:solidFill>
@@ -3927,7 +3927,7 @@
                           <a:ea typeface="WenQuanYi Micro Hei"/>
                           <a:cs typeface="WenQuanYi Micro Hei"/>
                         </a:rPr>
-                        <a:t>15.6 万</a:t>
+                        <a:t>约 11.4 万</a:t>
                       </a:r>
                     </a:p>
                   </a:txBody>
@@ -3943,7 +3943,7 @@
                     <a:lstStyle/>
                     <a:p>
                       <a:r>
-                        <a:rPr sz="1300" b="0" i="0">
+                        <a:rPr sz="1400" b="0" i="0">
                           <a:solidFill>
                             <a:srgbClr val="2A2D34"/>
                           </a:solidFill>
@@ -3951,7 +3951,7 @@
                           <a:ea typeface="WenQuanYi Micro Hei"/>
                           <a:cs typeface="WenQuanYi Micro Hei"/>
                         </a:rPr>
-                        <a:t>—</a:t>
+                        <a:t>约 5.7 万</a:t>
                       </a:r>
                     </a:p>
                   </a:txBody>
@@ -3962,14 +3962,14 @@
                   </a:tcPr>
                 </a:tc>
               </a:tr>
-              <a:tr h="811530">
+              <a:tr h="1082040">
                 <a:tc>
                   <a:txBody>
                     <a:bodyPr wrap="square"/>
                     <a:lstStyle/>
                     <a:p>
                       <a:r>
-                        <a:rPr sz="1300" b="0" i="0">
+                        <a:rPr sz="1400" b="0" i="0">
                           <a:solidFill>
                             <a:srgbClr val="2A2D34"/>
                           </a:solidFill>
@@ -3993,7 +3993,7 @@
                     <a:lstStyle/>
                     <a:p>
                       <a:r>
-                        <a:rPr sz="1300" b="0" i="0">
+                        <a:rPr sz="1400" b="0" i="0">
                           <a:solidFill>
                             <a:srgbClr val="2A2D34"/>
                           </a:solidFill>
@@ -4017,7 +4017,7 @@
                     <a:lstStyle/>
                     <a:p>
                       <a:r>
-                        <a:rPr sz="1300" b="0" i="0">
+                        <a:rPr sz="1400" b="0" i="0">
                           <a:solidFill>
                             <a:srgbClr val="2A2D34"/>
                           </a:solidFill>
@@ -4025,7 +4025,7 @@
                           <a:ea typeface="WenQuanYi Micro Hei"/>
                           <a:cs typeface="WenQuanYi Micro Hei"/>
                         </a:rPr>
-                        <a:t>约 29.2 万</a:t>
+                        <a:t>约 267 万</a:t>
                       </a:r>
                     </a:p>
                   </a:txBody>
@@ -4041,7 +4041,7 @@
                     <a:lstStyle/>
                     <a:p>
                       <a:r>
-                        <a:rPr sz="1300" b="0" i="0">
+                        <a:rPr sz="1400" b="0" i="0">
                           <a:solidFill>
                             <a:srgbClr val="2A2D34"/>
                           </a:solidFill>
@@ -4049,7 +4049,7 @@
                           <a:ea typeface="WenQuanYi Micro Hei"/>
                           <a:cs typeface="WenQuanYi Micro Hei"/>
                         </a:rPr>
-                        <a:t>—</a:t>
+                        <a:t>约 21.3 万</a:t>
                       </a:r>
                     </a:p>
                   </a:txBody>
@@ -4065,7 +4065,7 @@
                     <a:lstStyle/>
                     <a:p>
                       <a:r>
-                        <a:rPr sz="1300" b="0" i="0">
+                        <a:rPr sz="1400" b="0" i="0">
                           <a:solidFill>
                             <a:srgbClr val="2A2D34"/>
                           </a:solidFill>
@@ -4073,7 +4073,7 @@
                           <a:ea typeface="WenQuanYi Micro Hei"/>
                           <a:cs typeface="WenQuanYi Micro Hei"/>
                         </a:rPr>
-                        <a:t>约 43.8 万</a:t>
+                        <a:t>约 10.7 万</a:t>
                       </a:r>
                     </a:p>
                   </a:txBody>
@@ -4084,129 +4084,6 @@
                   </a:tcPr>
                 </a:tc>
               </a:tr>
-              <a:tr h="811530">
-                <a:tc>
-                  <a:txBody>
-                    <a:bodyPr wrap="square"/>
-                    <a:lstStyle/>
-                    <a:p>
-                      <a:r>
-                        <a:rPr sz="1300" b="0" i="0">
-                          <a:solidFill>
-                            <a:srgbClr val="2A2D34"/>
-                          </a:solidFill>
-                          <a:latin typeface="Georgia"/>
-                          <a:ea typeface="WenQuanYi Micro Hei"/>
-                          <a:cs typeface="WenQuanYi Micro Hei"/>
-                        </a:rPr>
-                        <a:t>中介带来的腰部</a:t>
-                      </a:r>
-                    </a:p>
-                  </a:txBody>
-                  <a:tcPr>
-                    <a:solidFill>
-                      <a:srgbClr val="FFFFFF"/>
-                    </a:solidFill>
-                  </a:tcPr>
-                </a:tc>
-                <a:tc>
-                  <a:txBody>
-                    <a:bodyPr wrap="square"/>
-                    <a:lstStyle/>
-                    <a:p>
-                      <a:r>
-                        <a:rPr sz="1300" b="0" i="0">
-                          <a:solidFill>
-                            <a:srgbClr val="2A2D34"/>
-                          </a:solidFill>
-                          <a:latin typeface="Georgia"/>
-                          <a:ea typeface="WenQuanYi Micro Hei"/>
-                          <a:cs typeface="WenQuanYi Micro Hei"/>
-                        </a:rPr>
-                        <a:t>800 ㎡ × 6.5 元</a:t>
-                      </a:r>
-                    </a:p>
-                  </a:txBody>
-                  <a:tcPr>
-                    <a:solidFill>
-                      <a:srgbClr val="FFFFFF"/>
-                    </a:solidFill>
-                  </a:tcPr>
-                </a:tc>
-                <a:tc>
-                  <a:txBody>
-                    <a:bodyPr wrap="square"/>
-                    <a:lstStyle/>
-                    <a:p>
-                      <a:r>
-                        <a:rPr sz="1300" b="0" i="0">
-                          <a:solidFill>
-                            <a:srgbClr val="2A2D34"/>
-                          </a:solidFill>
-                          <a:latin typeface="Georgia"/>
-                          <a:ea typeface="WenQuanYi Micro Hei"/>
-                          <a:cs typeface="WenQuanYi Micro Hei"/>
-                        </a:rPr>
-                        <a:t>约 15.6 万</a:t>
-                      </a:r>
-                    </a:p>
-                  </a:txBody>
-                  <a:tcPr>
-                    <a:solidFill>
-                      <a:srgbClr val="FFFFFF"/>
-                    </a:solidFill>
-                  </a:tcPr>
-                </a:tc>
-                <a:tc>
-                  <a:txBody>
-                    <a:bodyPr wrap="square"/>
-                    <a:lstStyle/>
-                    <a:p>
-                      <a:r>
-                        <a:rPr sz="1300" b="0" i="0">
-                          <a:solidFill>
-                            <a:srgbClr val="2A2D34"/>
-                          </a:solidFill>
-                          <a:latin typeface="Georgia"/>
-                          <a:ea typeface="WenQuanYi Micro Hei"/>
-                          <a:cs typeface="WenQuanYi Micro Hei"/>
-                        </a:rPr>
-                        <a:t>业主仍付 15.6 万
-我们约 4.7 万</a:t>
-                      </a:r>
-                    </a:p>
-                  </a:txBody>
-                  <a:tcPr>
-                    <a:solidFill>
-                      <a:srgbClr val="FFFFFF"/>
-                    </a:solidFill>
-                  </a:tcPr>
-                </a:tc>
-                <a:tc>
-                  <a:txBody>
-                    <a:bodyPr wrap="square"/>
-                    <a:lstStyle/>
-                    <a:p>
-                      <a:r>
-                        <a:rPr sz="1300" b="0" i="0">
-                          <a:solidFill>
-                            <a:srgbClr val="2A2D34"/>
-                          </a:solidFill>
-                          <a:latin typeface="Georgia"/>
-                          <a:ea typeface="WenQuanYi Micro Hei"/>
-                          <a:cs typeface="WenQuanYi Micro Hei"/>
-                        </a:rPr>
-                        <a:t>—</a:t>
-                      </a:r>
-                    </a:p>
-                  </a:txBody>
-                  <a:tcPr>
-                    <a:solidFill>
-                      <a:srgbClr val="FFFFFF"/>
-                    </a:solidFill>
-                  </a:tcPr>
-                </a:tc>
-              </a:tr>
             </a:tbl>
           </a:graphicData>
         </a:graphic>
@@ -4246,7 +4123,7 @@
                 <a:ea typeface="WenQuanYi Micro Hei"/>
                 <a:cs typeface="WenQuanYi Micro Hei"/>
               </a:rPr>
-              <a:t>包干 8 万从第一笔成功佣金里抵扣。招到了，试跑费等于退回。</a:t>
+              <a:t>启动费 15 万从第一笔成功佣金里抵扣。招到了，进场费等于预付佣金。</a:t>
             </a:r>
           </a:p>
           <a:p>
@@ -4260,7 +4137,7 @@
                 <a:ea typeface="WenQuanYi Micro Hei"/>
                 <a:cs typeface="WenQuanYi Micro Hei"/>
               </a:rPr>
-              <a:t>甲方自己带来的未报备客户，不付成功佣金。</a:t>
+              <a:t>当月有佣金，当月 8 万月度从该笔抵扣。甲方自有未报备客户不付佣金。</a:t>
             </a:r>
           </a:p>
           <a:p>
@@ -4551,7 +4428,7 @@
                 <a:ea typeface="WenQuanYi Micro Hei"/>
                 <a:cs typeface="WenQuanYi Micro Hei"/>
               </a:rPr>
-              <a:t>工作版 v1.1 · 可深化 · 收费口径勿改乱</a:t>
+              <a:t>工作版 v1.2 · 可深化 · 收费口径勿改乱</a:t>
             </a:r>
           </a:p>
         </p:txBody>
@@ -5111,21 +4988,7 @@
                 <a:ea typeface="WenQuanYi Micro Hei"/>
                 <a:cs typeface="WenQuanYi Micro Hei"/>
               </a:rPr>
-              <a:t>方案 B：先 90 天。方案 A：进场即 12 个月独家（第 91 天起月度 4 万）。</a:t>
-            </a:r>
-          </a:p>
-          <a:p>
-            <a:pPr algn="l"/>
-            <a:r>
-              <a:rPr sz="1600" b="0" i="0">
-                <a:solidFill>
-                  <a:srgbClr val="2A2D34"/>
-                </a:solidFill>
-                <a:latin typeface="Georgia"/>
-                <a:ea typeface="WenQuanYi Micro Hei"/>
-                <a:cs typeface="WenQuanYi Micro Hei"/>
-              </a:rPr>
-              <a:t>建议勾 B。</a:t>
+              <a:t>方案 B：先 90 天。方案 A：进场即 12 个月独家，月度 8 万从第 2 个月起。建议勾 B。</a:t>
             </a:r>
           </a:p>
         </p:txBody>
@@ -5402,7 +5265,7 @@
                 <a:ea typeface="WenQuanYi Micro Hei"/>
                 <a:cs typeface="WenQuanYi Micro Hei"/>
               </a:rPr>
-              <a:t>工作版 v1.1 · 可深化 · 收费口径勿改乱</a:t>
+              <a:t>工作版 v1.2 · 可深化 · 收费口径勿改乱</a:t>
             </a:r>
           </a:p>
         </p:txBody>
@@ -5712,7 +5575,7 @@
                 <a:ea typeface="WenQuanYi Micro Hei"/>
                 <a:cs typeface="WenQuanYi Micro Hei"/>
               </a:rPr>
-              <a:t>包干 8 万 · 首月 100% / 锚定 150% · 转正后月度 4 万可抵扣。</a:t>
+              <a:t>启动 15 万 · 月度 8 万 · 首年租金 8%。链主不上浮。</a:t>
             </a:r>
           </a:p>
         </p:txBody>
@@ -6259,7 +6122,7 @@
                 <a:ea typeface="WenQuanYi Micro Hei"/>
                 <a:cs typeface="WenQuanYi Micro Hei"/>
               </a:rPr>
-              <a:t>工作版 v1.1 · 可深化 · 收费口径勿改乱</a:t>
+              <a:t>工作版 v1.2 · 可深化 · 收费口径勿改乱</a:t>
             </a:r>
           </a:p>
         </p:txBody>
@@ -7116,7 +6979,7 @@
                 <a:ea typeface="WenQuanYi Micro Hei"/>
                 <a:cs typeface="WenQuanYi Micro Hei"/>
               </a:rPr>
-              <a:t>工作版 v1.1 · 可深化 · 收费口径勿改乱</a:t>
+              <a:t>工作版 v1.2 · 可深化 · 收费口径勿改乱</a:t>
             </a:r>
           </a:p>
         </p:txBody>
@@ -7981,7 +7844,7 @@
                 <a:ea typeface="WenQuanYi Micro Hei"/>
                 <a:cs typeface="WenQuanYi Micro Hei"/>
               </a:rPr>
-              <a:t>工作版 v1.1 · 可深化 · 收费口径勿改乱</a:t>
+              <a:t>工作版 v1.2 · 可深化 · 收费口径勿改乱</a:t>
             </a:r>
           </a:p>
         </p:txBody>
@@ -8942,7 +8805,7 @@
                 <a:ea typeface="WenQuanYi Micro Hei"/>
                 <a:cs typeface="WenQuanYi Micro Hei"/>
               </a:rPr>
-              <a:t>工作版 v1.1 · 可深化 · 收费口径勿改乱</a:t>
+              <a:t>工作版 v1.2 · 可深化 · 收费口径勿改乱</a:t>
             </a:r>
           </a:p>
         </p:txBody>
@@ -10351,7 +10214,7 @@
                 <a:ea typeface="WenQuanYi Micro Hei"/>
                 <a:cs typeface="WenQuanYi Micro Hei"/>
               </a:rPr>
-              <a:t>工作版 v1.1 · 可深化 · 收费口径勿改乱</a:t>
+              <a:t>工作版 v1.2 · 可深化 · 收费口径勿改乱</a:t>
             </a:r>
           </a:p>
         </p:txBody>
@@ -11256,7 +11119,7 @@
                 <a:ea typeface="WenQuanYi Micro Hei"/>
                 <a:cs typeface="WenQuanYi Micro Hei"/>
               </a:rPr>
-              <a:t>工作版 v1.1 · 可深化 · 收费口径勿改乱</a:t>
+              <a:t>工作版 v1.2 · 可深化 · 收费口径勿改乱</a:t>
             </a:r>
           </a:p>
         </p:txBody>
@@ -12233,7 +12096,7 @@
                 <a:ea typeface="WenQuanYi Micro Hei"/>
                 <a:cs typeface="WenQuanYi Micro Hei"/>
               </a:rPr>
-              <a:t>工作版 v1.1 · 可深化 · 收费口径勿改乱</a:t>
+              <a:t>工作版 v1.2 · 可深化 · 收费口径勿改乱</a:t>
             </a:r>
           </a:p>
         </p:txBody>
@@ -13432,7 +13295,7 @@
                 <a:ea typeface="WenQuanYi Micro Hei"/>
                 <a:cs typeface="WenQuanYi Micro Hei"/>
               </a:rPr>
-              <a:t>月度和佣金为什么改</a:t>
+              <a:t>原口径三笔账 · 四条柔化</a:t>
             </a:r>
           </a:p>
         </p:txBody>
@@ -13472,7 +13335,7 @@
                 <a:ea typeface="WenQuanYi Micro Hei"/>
                 <a:cs typeface="WenQuanYi Micro Hei"/>
               </a:rPr>
-              <a:t>叠在一起高了。单独看「一个点佣金」并不高。</a:t>
+              <a:t>方向不变：15 万 + 8 万/月 + 首年租金 8%。只减轻叠加。</a:t>
             </a:r>
           </a:p>
         </p:txBody>
@@ -13554,7 +13417,7 @@
                 <a:ea typeface="WenQuanYi Micro Hei"/>
                 <a:cs typeface="WenQuanYi Micro Hei"/>
               </a:rPr>
-              <a:t>工作版 v1.1 · 可深化 · 收费口径勿改乱</a:t>
+              <a:t>工作版 v1.2 · 可深化 · 收费口径勿改乱</a:t>
             </a:r>
           </a:p>
         </p:txBody>
@@ -13618,9 +13481,9 @@
                 <a:tableStyleId>{5C22544A-7EE6-4342-B048-85BDC9FD1C3A}</a:tableStyleId>
               </a:tblPr>
               <a:tblGrid>
-                <a:gridCol w="2011680"/>
-                <a:gridCol w="4846320"/>
-                <a:gridCol w="4663440"/>
+                <a:gridCol w="2194560"/>
+                <a:gridCol w="3291840"/>
+                <a:gridCol w="6035040"/>
               </a:tblGrid>
               <a:tr h="676656">
                 <a:tc>
@@ -13663,7 +13526,7 @@
                           <a:ea typeface="WenQuanYi Micro Hei"/>
                           <a:cs typeface="WenQuanYi Micro Hei"/>
                         </a:rPr>
-                        <a:t>上一版（偏高）</a:t>
+                        <a:t>数字</a:t>
                       </a:r>
                     </a:p>
                   </a:txBody>
@@ -13688,7 +13551,7 @@
                           <a:ea typeface="WenQuanYi Micro Hei"/>
                           <a:cs typeface="WenQuanYi Micro Hei"/>
                         </a:rPr>
-                        <a:t>现在对齐</a:t>
+                        <a:t>柔化</a:t>
                       </a:r>
                     </a:p>
                   </a:txBody>
@@ -13714,7 +13577,7 @@
                           <a:ea typeface="WenQuanYi Micro Hei"/>
                           <a:cs typeface="WenQuanYi Micro Hei"/>
                         </a:rPr>
-                        <a:t>90 天现金</a:t>
+                        <a:t>启动费</a:t>
                       </a:r>
                     </a:p>
                   </a:txBody>
@@ -13738,7 +13601,7 @@
                           <a:ea typeface="WenQuanYi Micro Hei"/>
                           <a:cs typeface="WenQuanYi Micro Hei"/>
                         </a:rPr>
-                        <a:t>启动 15 万 + 月度 8×3 ≈ 39 万</a:t>
+                        <a:t>15 万一次性</a:t>
                       </a:r>
                     </a:p>
                   </a:txBody>
@@ -13762,7 +13625,7 @@
                           <a:ea typeface="WenQuanYi Micro Hei"/>
                           <a:cs typeface="WenQuanYi Micro Hei"/>
                         </a:rPr>
-                        <a:t>包干 8 万，不另收月度</a:t>
+                        <a:t>含第一个月；全额抵扣成功佣金</a:t>
                       </a:r>
                     </a:p>
                   </a:txBody>
@@ -13788,7 +13651,7 @@
                           <a:ea typeface="WenQuanYi Micro Hei"/>
                           <a:cs typeface="WenQuanYi Micro Hei"/>
                         </a:rPr>
-                        <a:t>成功佣金</a:t>
+                        <a:t>月度</a:t>
                       </a:r>
                     </a:p>
                   </a:txBody>
@@ -13812,7 +13675,7 @@
                           <a:ea typeface="WenQuanYi Micro Hei"/>
                           <a:cs typeface="WenQuanYi Micro Hei"/>
                         </a:rPr>
-                        <a:t>首年租金 8% / 12%（听着像切利润）</a:t>
+                        <a:t>8 万 / 月</a:t>
                       </a:r>
                     </a:p>
                   </a:txBody>
@@ -13836,7 +13699,7 @@
                           <a:ea typeface="WenQuanYi Micro Hei"/>
                           <a:cs typeface="WenQuanYi Micro Hei"/>
                         </a:rPr>
-                        <a:t>首月净租金 100% / 锚定 150%（和中介同一尺）</a:t>
+                        <a:t>第 2 个月起付；当月有佣金则抵扣</a:t>
                       </a:r>
                     </a:p>
                   </a:txBody>
@@ -13862,7 +13725,7 @@
                           <a:ea typeface="WenQuanYi Micro Hei"/>
                           <a:cs typeface="WenQuanYi Micro Hei"/>
                         </a:rPr>
-                        <a:t>中介单</a:t>
+                        <a:t>成功佣金</a:t>
                       </a:r>
                     </a:p>
                   </a:txBody>
@@ -13886,7 +13749,7 @@
                           <a:ea typeface="WenQuanYi Micro Hei"/>
                           <a:cs typeface="WenQuanYi Micro Hei"/>
                         </a:rPr>
-                        <a:t>中介满佣 + 我们再拿 50%</a:t>
+                        <a:t>首年租金 8%</a:t>
                       </a:r>
                     </a:p>
                   </a:txBody>
@@ -13910,7 +13773,7 @@
                           <a:ea typeface="WenQuanYi Micro Hei"/>
                           <a:cs typeface="WenQuanYi Micro Hei"/>
                         </a:rPr>
-                        <a:t>业主只付一套，中介约 70% + 我们约 30%</a:t>
+                        <a:t>扣税、物业、免租；链主不上浮到 12%</a:t>
                       </a:r>
                     </a:p>
                   </a:txBody>
@@ -13936,7 +13799,7 @@
                           <a:ea typeface="WenQuanYi Micro Hei"/>
                           <a:cs typeface="WenQuanYi Micro Hei"/>
                         </a:rPr>
-                        <a:t>转正后月度</a:t>
+                        <a:t>中介单 · 我们</a:t>
                       </a:r>
                     </a:p>
                   </a:txBody>
@@ -13960,7 +13823,7 @@
                           <a:ea typeface="WenQuanYi Micro Hei"/>
                           <a:cs typeface="WenQuanYi Micro Hei"/>
                         </a:rPr>
-                        <a:t>8 万/月从进场就收</a:t>
+                        <a:t>按 8% 的一半 = 4%</a:t>
                       </a:r>
                     </a:p>
                   </a:txBody>
@@ -13984,7 +13847,7 @@
                           <a:ea typeface="WenQuanYi Micro Hei"/>
                           <a:cs typeface="WenQuanYi Micro Hei"/>
                         </a:rPr>
-                        <a:t>第 91 天起 4 万/月；当月有佣金则抵扣</a:t>
+                        <a:t>不跟中介各收满额</a:t>
                       </a:r>
                     </a:p>
                   </a:txBody>
@@ -14076,7 +13939,7 @@
                 <a:ea typeface="WenQuanYi Micro Hei"/>
                 <a:cs typeface="WenQuanYi Micro Hei"/>
               </a:rPr>
-              <a:t>试跑 90 天若无人成交，业主只出 8 万。有成交，再按「一个点」付。</a:t>
+              <a:t>8% 扣免租后大约合 0.7 个月面租金，比纯中介一个点软。</a:t>
             </a:r>
           </a:p>
           <a:p>
@@ -14090,7 +13953,7 @@
                 <a:ea typeface="WenQuanYi Micro Hei"/>
                 <a:cs typeface="WenQuanYi Micro Hei"/>
               </a:rPr>
-              <a:t>4,000 ㎡ 空一年，6.5 元/㎡·天，大约少收 949 万。</a:t>
+              <a:t>试跑 90 天若无成交，现金约 15 + 16 = 31 万。达不到必须项可以不转正。</a:t>
             </a:r>
           </a:p>
         </p:txBody>
